--- a/electronics/electronics.pptx
+++ b/electronics/electronics.pptx
@@ -12,8 +12,7 @@
     <p:sldId id="260" r:id="rId6"/>
     <p:sldId id="261" r:id="rId7"/>
     <p:sldId id="262" r:id="rId8"/>
-    <p:sldId id="263" r:id="rId9"/>
-    <p:sldId id="264" r:id="rId10"/>
+    <p:sldId id="264" r:id="rId9"/>
   </p:sldIdLst>
   <p:sldSz cx="12192000" cy="6858000"/>
   <p:notesSz cx="6858000" cy="9144000"/>
@@ -112,6 +111,11 @@
       </a:defRPr>
     </a:lvl9pPr>
   </p:defaultTextStyle>
+  <p:extLst>
+    <p:ext uri="{EFAFB233-063F-42B5-8137-9DF3F51BA10A}">
+      <p15:sldGuideLst xmlns:p15="http://schemas.microsoft.com/office/powerpoint/2012/main"/>
+    </p:ext>
+  </p:extLst>
 </p:presentation>
 </file>
 
@@ -264,7 +268,7 @@
           <a:p>
             <a:fld id="{8A900E5E-517A-4D25-85A2-C703F455EAAB}" type="datetimeFigureOut">
               <a:rPr lang="nl-BE" smtClean="0"/>
-              <a:t>23/04/2026</a:t>
+              <a:t>24/04/2026</a:t>
             </a:fld>
             <a:endParaRPr lang="nl-BE"/>
           </a:p>
@@ -464,7 +468,7 @@
           <a:p>
             <a:fld id="{8A900E5E-517A-4D25-85A2-C703F455EAAB}" type="datetimeFigureOut">
               <a:rPr lang="nl-BE" smtClean="0"/>
-              <a:t>23/04/2026</a:t>
+              <a:t>24/04/2026</a:t>
             </a:fld>
             <a:endParaRPr lang="nl-BE"/>
           </a:p>
@@ -674,7 +678,7 @@
           <a:p>
             <a:fld id="{8A900E5E-517A-4D25-85A2-C703F455EAAB}" type="datetimeFigureOut">
               <a:rPr lang="nl-BE" smtClean="0"/>
-              <a:t>23/04/2026</a:t>
+              <a:t>24/04/2026</a:t>
             </a:fld>
             <a:endParaRPr lang="nl-BE"/>
           </a:p>
@@ -874,7 +878,7 @@
           <a:p>
             <a:fld id="{8A900E5E-517A-4D25-85A2-C703F455EAAB}" type="datetimeFigureOut">
               <a:rPr lang="nl-BE" smtClean="0"/>
-              <a:t>23/04/2026</a:t>
+              <a:t>24/04/2026</a:t>
             </a:fld>
             <a:endParaRPr lang="nl-BE"/>
           </a:p>
@@ -1150,7 +1154,7 @@
           <a:p>
             <a:fld id="{8A900E5E-517A-4D25-85A2-C703F455EAAB}" type="datetimeFigureOut">
               <a:rPr lang="nl-BE" smtClean="0"/>
-              <a:t>23/04/2026</a:t>
+              <a:t>24/04/2026</a:t>
             </a:fld>
             <a:endParaRPr lang="nl-BE"/>
           </a:p>
@@ -1418,7 +1422,7 @@
           <a:p>
             <a:fld id="{8A900E5E-517A-4D25-85A2-C703F455EAAB}" type="datetimeFigureOut">
               <a:rPr lang="nl-BE" smtClean="0"/>
-              <a:t>23/04/2026</a:t>
+              <a:t>24/04/2026</a:t>
             </a:fld>
             <a:endParaRPr lang="nl-BE"/>
           </a:p>
@@ -1833,7 +1837,7 @@
           <a:p>
             <a:fld id="{8A900E5E-517A-4D25-85A2-C703F455EAAB}" type="datetimeFigureOut">
               <a:rPr lang="nl-BE" smtClean="0"/>
-              <a:t>23/04/2026</a:t>
+              <a:t>24/04/2026</a:t>
             </a:fld>
             <a:endParaRPr lang="nl-BE"/>
           </a:p>
@@ -1975,7 +1979,7 @@
           <a:p>
             <a:fld id="{8A900E5E-517A-4D25-85A2-C703F455EAAB}" type="datetimeFigureOut">
               <a:rPr lang="nl-BE" smtClean="0"/>
-              <a:t>23/04/2026</a:t>
+              <a:t>24/04/2026</a:t>
             </a:fld>
             <a:endParaRPr lang="nl-BE"/>
           </a:p>
@@ -2088,7 +2092,7 @@
           <a:p>
             <a:fld id="{8A900E5E-517A-4D25-85A2-C703F455EAAB}" type="datetimeFigureOut">
               <a:rPr lang="nl-BE" smtClean="0"/>
-              <a:t>23/04/2026</a:t>
+              <a:t>24/04/2026</a:t>
             </a:fld>
             <a:endParaRPr lang="nl-BE"/>
           </a:p>
@@ -2401,7 +2405,7 @@
           <a:p>
             <a:fld id="{8A900E5E-517A-4D25-85A2-C703F455EAAB}" type="datetimeFigureOut">
               <a:rPr lang="nl-BE" smtClean="0"/>
-              <a:t>23/04/2026</a:t>
+              <a:t>24/04/2026</a:t>
             </a:fld>
             <a:endParaRPr lang="nl-BE"/>
           </a:p>
@@ -2690,7 +2694,7 @@
           <a:p>
             <a:fld id="{8A900E5E-517A-4D25-85A2-C703F455EAAB}" type="datetimeFigureOut">
               <a:rPr lang="nl-BE" smtClean="0"/>
-              <a:t>23/04/2026</a:t>
+              <a:t>24/04/2026</a:t>
             </a:fld>
             <a:endParaRPr lang="nl-BE"/>
           </a:p>
@@ -2933,7 +2937,7 @@
           <a:p>
             <a:fld id="{8A900E5E-517A-4D25-85A2-C703F455EAAB}" type="datetimeFigureOut">
               <a:rPr lang="nl-BE" smtClean="0"/>
-              <a:t>23/04/2026</a:t>
+              <a:t>24/04/2026</a:t>
             </a:fld>
             <a:endParaRPr lang="nl-BE"/>
           </a:p>
@@ -4454,11 +4458,7 @@
             </a:r>
             <a:r>
               <a:rPr lang="nl-BE" dirty="0"/>
-              <a:t>; feedback, </a:t>
-            </a:r>
-            <a:r>
-              <a:rPr lang="nl-BE"/>
-              <a:t>niet nodig</a:t>
+              <a:t>; feedback, niet nodig</a:t>
             </a:r>
           </a:p>
         </p:txBody>
@@ -4608,11 +4608,11 @@
           </a:p>
           <a:p>
             <a:r>
-              <a:rPr lang="nl-BE" dirty="0"/>
-              <a:t>https://www.instructables.com/How-to-Interface-HX711-Balance-Module-With-Load-Ce/</a:t>
-            </a:r>
-          </a:p>
-          <a:p>
+              <a:rPr lang="nl-BE" dirty="0">
+                <a:hlinkClick r:id="rId2"/>
+              </a:rPr>
+              <a:t>https://hughevans.dev/load-cell-raspberry-pi/</a:t>
+            </a:r>
             <a:endParaRPr lang="nl-BE" dirty="0"/>
           </a:p>
           <a:p>
@@ -4733,115 +4733,6 @@
 </file>
 
 <file path=ppt/slides/slide8.xml><?xml version="1.0" encoding="utf-8"?>
-<p:sld xmlns:a="http://schemas.openxmlformats.org/drawingml/2006/main" xmlns:r="http://schemas.openxmlformats.org/officeDocument/2006/relationships" xmlns:p="http://schemas.openxmlformats.org/presentationml/2006/main">
-  <p:cSld>
-    <p:spTree>
-      <p:nvGrpSpPr>
-        <p:cNvPr id="1" name=""/>
-        <p:cNvGrpSpPr/>
-        <p:nvPr/>
-      </p:nvGrpSpPr>
-      <p:grpSpPr>
-        <a:xfrm>
-          <a:off x="0" y="0"/>
-          <a:ext cx="0" cy="0"/>
-          <a:chOff x="0" y="0"/>
-          <a:chExt cx="0" cy="0"/>
-        </a:xfrm>
-      </p:grpSpPr>
-      <p:sp>
-        <p:nvSpPr>
-          <p:cNvPr id="2" name="Titel 1">
-            <a:extLst>
-              <a:ext uri="{FF2B5EF4-FFF2-40B4-BE49-F238E27FC236}">
-                <a16:creationId xmlns:a16="http://schemas.microsoft.com/office/drawing/2014/main" id="{39F3FEE5-1F3B-2F21-391E-DD5C622BB708}"/>
-              </a:ext>
-            </a:extLst>
-          </p:cNvPr>
-          <p:cNvSpPr>
-            <a:spLocks noGrp="1"/>
-          </p:cNvSpPr>
-          <p:nvPr>
-            <p:ph type="title"/>
-          </p:nvPr>
-        </p:nvSpPr>
-        <p:spPr/>
-        <p:txBody>
-          <a:bodyPr/>
-          <a:lstStyle/>
-          <a:p>
-            <a:r>
-              <a:rPr lang="nl-NL" dirty="0"/>
-              <a:t>HX711</a:t>
-            </a:r>
-            <a:endParaRPr lang="nl-BE" dirty="0"/>
-          </a:p>
-        </p:txBody>
-      </p:sp>
-      <p:sp>
-        <p:nvSpPr>
-          <p:cNvPr id="3" name="Tijdelijke aanduiding voor inhoud 2">
-            <a:extLst>
-              <a:ext uri="{FF2B5EF4-FFF2-40B4-BE49-F238E27FC236}">
-                <a16:creationId xmlns:a16="http://schemas.microsoft.com/office/drawing/2014/main" id="{FC4BB511-0A82-9FCF-DB4C-E5649DF567CA}"/>
-              </a:ext>
-            </a:extLst>
-          </p:cNvPr>
-          <p:cNvSpPr>
-            <a:spLocks noGrp="1"/>
-          </p:cNvSpPr>
-          <p:nvPr>
-            <p:ph idx="1"/>
-          </p:nvPr>
-        </p:nvSpPr>
-        <p:spPr/>
-        <p:txBody>
-          <a:bodyPr/>
-          <a:lstStyle/>
-          <a:p>
-            <a:r>
-              <a:rPr lang="nl-NL" dirty="0"/>
-              <a:t>AVD </a:t>
-            </a:r>
-            <a:r>
-              <a:rPr lang="nl-NL" dirty="0" err="1"/>
-              <a:t>capacity</a:t>
-            </a:r>
-            <a:r>
-              <a:rPr lang="nl-NL" dirty="0"/>
-              <a:t>: groter is beter filteren</a:t>
-            </a:r>
-          </a:p>
-          <a:p>
-            <a:r>
-              <a:rPr lang="nl-NL" dirty="0"/>
-              <a:t>Onderste </a:t>
-            </a:r>
-            <a:r>
-              <a:rPr lang="nl-NL" dirty="0" err="1"/>
-              <a:t>capacity</a:t>
-            </a:r>
-            <a:r>
-              <a:rPr lang="nl-NL" dirty="0"/>
-              <a:t>: groter is beter filteren</a:t>
-            </a:r>
-          </a:p>
-        </p:txBody>
-      </p:sp>
-    </p:spTree>
-    <p:extLst>
-      <p:ext uri="{BB962C8B-B14F-4D97-AF65-F5344CB8AC3E}">
-        <p14:creationId xmlns:p14="http://schemas.microsoft.com/office/powerpoint/2010/main" val="3210493649"/>
-      </p:ext>
-    </p:extLst>
-  </p:cSld>
-  <p:clrMapOvr>
-    <a:masterClrMapping/>
-  </p:clrMapOvr>
-</p:sld>
-</file>
-
-<file path=ppt/slides/slide9.xml><?xml version="1.0" encoding="utf-8"?>
 <p:sld xmlns:a="http://schemas.openxmlformats.org/drawingml/2006/main" xmlns:r="http://schemas.openxmlformats.org/officeDocument/2006/relationships" xmlns:p="http://schemas.openxmlformats.org/presentationml/2006/main">
   <p:cSld>
     <p:spTree>

--- a/electronics/electronics.pptx
+++ b/electronics/electronics.pptx
@@ -13,6 +13,8 @@
     <p:sldId id="261" r:id="rId7"/>
     <p:sldId id="262" r:id="rId8"/>
     <p:sldId id="264" r:id="rId9"/>
+    <p:sldId id="266" r:id="rId10"/>
+    <p:sldId id="267" r:id="rId11"/>
   </p:sldIdLst>
   <p:sldSz cx="12192000" cy="6858000"/>
   <p:notesSz cx="6858000" cy="9144000"/>
@@ -3425,6 +3427,91 @@
 </p:sld>
 </file>
 
+<file path=ppt/slides/slide10.xml><?xml version="1.0" encoding="utf-8"?>
+<p:sld xmlns:a="http://schemas.openxmlformats.org/drawingml/2006/main" xmlns:r="http://schemas.openxmlformats.org/officeDocument/2006/relationships" xmlns:p="http://schemas.openxmlformats.org/presentationml/2006/main">
+  <p:cSld>
+    <p:spTree>
+      <p:nvGrpSpPr>
+        <p:cNvPr id="1" name=""/>
+        <p:cNvGrpSpPr/>
+        <p:nvPr/>
+      </p:nvGrpSpPr>
+      <p:grpSpPr>
+        <a:xfrm>
+          <a:off x="0" y="0"/>
+          <a:ext cx="0" cy="0"/>
+          <a:chOff x="0" y="0"/>
+          <a:chExt cx="0" cy="0"/>
+        </a:xfrm>
+      </p:grpSpPr>
+      <p:sp>
+        <p:nvSpPr>
+          <p:cNvPr id="2" name="Titel 1">
+            <a:extLst>
+              <a:ext uri="{FF2B5EF4-FFF2-40B4-BE49-F238E27FC236}">
+                <a16:creationId xmlns:a16="http://schemas.microsoft.com/office/drawing/2014/main" id="{4146D207-DB99-B5A8-5072-8D4A9A58EE91}"/>
+              </a:ext>
+            </a:extLst>
+          </p:cNvPr>
+          <p:cNvSpPr>
+            <a:spLocks noGrp="1"/>
+          </p:cNvSpPr>
+          <p:nvPr>
+            <p:ph type="title"/>
+          </p:nvPr>
+        </p:nvSpPr>
+        <p:spPr/>
+        <p:txBody>
+          <a:bodyPr/>
+          <a:lstStyle/>
+          <a:p>
+            <a:endParaRPr lang="nl-BE"/>
+          </a:p>
+        </p:txBody>
+      </p:sp>
+      <p:pic>
+        <p:nvPicPr>
+          <p:cNvPr id="5" name="Afbeelding 4">
+            <a:extLst>
+              <a:ext uri="{FF2B5EF4-FFF2-40B4-BE49-F238E27FC236}">
+                <a16:creationId xmlns:a16="http://schemas.microsoft.com/office/drawing/2014/main" id="{6E36556F-F801-0C19-6538-E91F59381821}"/>
+              </a:ext>
+            </a:extLst>
+          </p:cNvPr>
+          <p:cNvPicPr>
+            <a:picLocks noChangeAspect="1"/>
+          </p:cNvPicPr>
+          <p:nvPr/>
+        </p:nvPicPr>
+        <p:blipFill>
+          <a:blip r:embed="rId2"/>
+          <a:stretch>
+            <a:fillRect/>
+          </a:stretch>
+        </p:blipFill>
+        <p:spPr>
+          <a:xfrm>
+            <a:off x="3328601" y="1614234"/>
+            <a:ext cx="5534797" cy="3629532"/>
+          </a:xfrm>
+          <a:prstGeom prst="rect">
+            <a:avLst/>
+          </a:prstGeom>
+        </p:spPr>
+      </p:pic>
+    </p:spTree>
+    <p:extLst>
+      <p:ext uri="{BB962C8B-B14F-4D97-AF65-F5344CB8AC3E}">
+        <p14:creationId xmlns:p14="http://schemas.microsoft.com/office/powerpoint/2010/main" val="2205541609"/>
+      </p:ext>
+    </p:extLst>
+  </p:cSld>
+  <p:clrMapOvr>
+    <a:masterClrMapping/>
+  </p:clrMapOvr>
+</p:sld>
+</file>
+
 <file path=ppt/slides/slide2.xml><?xml version="1.0" encoding="utf-8"?>
 <p:sld xmlns:a="http://schemas.openxmlformats.org/drawingml/2006/main" xmlns:r="http://schemas.openxmlformats.org/officeDocument/2006/relationships" xmlns:p="http://schemas.openxmlformats.org/presentationml/2006/main">
   <p:cSld>
@@ -4931,6 +5018,93 @@
     <p:extLst>
       <p:ext uri="{BB962C8B-B14F-4D97-AF65-F5344CB8AC3E}">
         <p14:creationId xmlns:p14="http://schemas.microsoft.com/office/powerpoint/2010/main" val="149530432"/>
+      </p:ext>
+    </p:extLst>
+  </p:cSld>
+  <p:clrMapOvr>
+    <a:masterClrMapping/>
+  </p:clrMapOvr>
+</p:sld>
+</file>
+
+<file path=ppt/slides/slide9.xml><?xml version="1.0" encoding="utf-8"?>
+<p:sld xmlns:a="http://schemas.openxmlformats.org/drawingml/2006/main" xmlns:r="http://schemas.openxmlformats.org/officeDocument/2006/relationships" xmlns:p="http://schemas.openxmlformats.org/presentationml/2006/main">
+  <p:cSld>
+    <p:spTree>
+      <p:nvGrpSpPr>
+        <p:cNvPr id="1" name=""/>
+        <p:cNvGrpSpPr/>
+        <p:nvPr/>
+      </p:nvGrpSpPr>
+      <p:grpSpPr>
+        <a:xfrm>
+          <a:off x="0" y="0"/>
+          <a:ext cx="0" cy="0"/>
+          <a:chOff x="0" y="0"/>
+          <a:chExt cx="0" cy="0"/>
+        </a:xfrm>
+      </p:grpSpPr>
+      <p:sp>
+        <p:nvSpPr>
+          <p:cNvPr id="2" name="Titel 1">
+            <a:extLst>
+              <a:ext uri="{FF2B5EF4-FFF2-40B4-BE49-F238E27FC236}">
+                <a16:creationId xmlns:a16="http://schemas.microsoft.com/office/drawing/2014/main" id="{337C2FCB-798D-24B6-24F9-AAD2D6DDC965}"/>
+              </a:ext>
+            </a:extLst>
+          </p:cNvPr>
+          <p:cNvSpPr>
+            <a:spLocks noGrp="1"/>
+          </p:cNvSpPr>
+          <p:nvPr>
+            <p:ph type="title"/>
+          </p:nvPr>
+        </p:nvSpPr>
+        <p:spPr/>
+        <p:txBody>
+          <a:bodyPr/>
+          <a:lstStyle/>
+          <a:p>
+            <a:endParaRPr lang="nl-BE"/>
+          </a:p>
+        </p:txBody>
+      </p:sp>
+      <p:pic>
+        <p:nvPicPr>
+          <p:cNvPr id="5" name="Tijdelijke aanduiding voor inhoud 4">
+            <a:extLst>
+              <a:ext uri="{FF2B5EF4-FFF2-40B4-BE49-F238E27FC236}">
+                <a16:creationId xmlns:a16="http://schemas.microsoft.com/office/drawing/2014/main" id="{74A59D21-99C6-6C10-D229-8343A3920768}"/>
+              </a:ext>
+            </a:extLst>
+          </p:cNvPr>
+          <p:cNvPicPr>
+            <a:picLocks noGrp="1" noChangeAspect="1"/>
+          </p:cNvPicPr>
+          <p:nvPr>
+            <p:ph idx="1"/>
+          </p:nvPr>
+        </p:nvPicPr>
+        <p:blipFill>
+          <a:blip r:embed="rId2"/>
+          <a:stretch>
+            <a:fillRect/>
+          </a:stretch>
+        </p:blipFill>
+        <p:spPr>
+          <a:xfrm>
+            <a:off x="2041649" y="1858863"/>
+            <a:ext cx="7316221" cy="3705742"/>
+          </a:xfrm>
+          <a:prstGeom prst="rect">
+            <a:avLst/>
+          </a:prstGeom>
+        </p:spPr>
+      </p:pic>
+    </p:spTree>
+    <p:extLst>
+      <p:ext uri="{BB962C8B-B14F-4D97-AF65-F5344CB8AC3E}">
+        <p14:creationId xmlns:p14="http://schemas.microsoft.com/office/powerpoint/2010/main" val="2611316962"/>
       </p:ext>
     </p:extLst>
   </p:cSld>
